--- a/morning-registration-activities/form-time-quiz/downloads/Form_Time_Quiz_Volume_Two_Year_10_and_11.pptx
+++ b/morning-registration-activities/form-time-quiz/downloads/Form_Time_Quiz_Volume_Two_Year_10_and_11.pptx
@@ -3193,7 +3193,7 @@
                 <a:solidFill>
                   <a:srgbClr val="2B6573"/>
                 </a:solidFill>
-                <a:latin typeface="Karla"/>
+                <a:latin typeface="Calibri"/>
               </a:rPr>
               <a:t>MORNING REGISTRATION ACTIVITIES</a:t>
             </a:r>
@@ -3231,11 +3231,11 @@
               </a:spcAft>
             </a:pPr>
             <a:r>
-              <a:rPr sz="3000" b="1" i="0">
+              <a:rPr sz="3000" b="0" i="0">
                 <a:solidFill>
                   <a:srgbClr val="2B6573"/>
                 </a:solidFill>
-                <a:latin typeface="Libre Caslon Display"/>
+                <a:latin typeface="Georgia"/>
               </a:rPr>
               <a:t>The Form Time Quiz</a:t>
             </a:r>
@@ -3290,7 +3290,7 @@
                 <a:solidFill>
                   <a:srgbClr val="FFFDF7"/>
                 </a:solidFill>
-                <a:latin typeface="Karla"/>
+                <a:latin typeface="Calibri"/>
               </a:rPr>
               <a:t>VOLUME TWO  ·  YEAR 10 AND 11</a:t>
             </a:r>
@@ -3332,7 +3332,7 @@
                 <a:solidFill>
                   <a:srgbClr val="5C6552"/>
                 </a:solidFill>
-                <a:latin typeface="Karla"/>
+                <a:latin typeface="Calibri"/>
               </a:rPr>
               <a:t>Ten questions: six on spotting fake news, then four of general knowledge.</a:t>
             </a:r>
@@ -3482,11 +3482,11 @@
               </a:spcAft>
             </a:pPr>
             <a:r>
-              <a:rPr sz="1350" b="1" i="0">
+              <a:rPr sz="1350" b="0" i="0">
                 <a:solidFill>
                   <a:srgbClr val="2B6573"/>
                 </a:solidFill>
-                <a:latin typeface="Libre Caslon Display"/>
+                <a:latin typeface="Georgia"/>
               </a:rPr>
               <a:t>Get into teams</a:t>
             </a:r>
@@ -3528,7 +3528,7 @@
                 <a:solidFill>
                   <a:srgbClr val="5C6552"/>
                 </a:solidFill>
-                <a:latin typeface="Karla"/>
+                <a:latin typeface="Calibri"/>
               </a:rPr>
               <a:t>Three or four to a team, with one answer sheet between you.</a:t>
             </a:r>
@@ -3678,11 +3678,11 @@
               </a:spcAft>
             </a:pPr>
             <a:r>
-              <a:rPr sz="1350" b="1" i="0">
+              <a:rPr sz="1350" b="0" i="0">
                 <a:solidFill>
                   <a:srgbClr val="2B6573"/>
                 </a:solidFill>
-                <a:latin typeface="Libre Caslon Display"/>
+                <a:latin typeface="Georgia"/>
               </a:rPr>
               <a:t>Answer together</a:t>
             </a:r>
@@ -3724,7 +3724,7 @@
                 <a:solidFill>
                   <a:srgbClr val="5C6552"/>
                 </a:solidFill>
-                <a:latin typeface="Karla"/>
+                <a:latin typeface="Calibri"/>
               </a:rPr>
               <a:t>Each question goes up on the board. Agree an answer, then write it down.</a:t>
             </a:r>
@@ -3874,11 +3874,11 @@
               </a:spcAft>
             </a:pPr>
             <a:r>
-              <a:rPr sz="1350" b="1" i="0">
+              <a:rPr sz="1350" b="0" i="0">
                 <a:solidFill>
                   <a:srgbClr val="2B6573"/>
                 </a:solidFill>
-                <a:latin typeface="Libre Caslon Display"/>
+                <a:latin typeface="Georgia"/>
               </a:rPr>
               <a:t>Swap and mark</a:t>
             </a:r>
@@ -3920,7 +3920,7 @@
                 <a:solidFill>
                   <a:srgbClr val="5C6552"/>
                 </a:solidFill>
-                <a:latin typeface="Karla"/>
+                <a:latin typeface="Calibri"/>
               </a:rPr>
               <a:t>Swap sheets with the team next to you, then the answers go up one at a time.</a:t>
             </a:r>
@@ -3962,7 +3962,7 @@
                 <a:solidFill>
                   <a:srgbClr val="8B9179"/>
                 </a:solidFill>
-                <a:latin typeface="Karla"/>
+                <a:latin typeface="Calibri"/>
               </a:rPr>
               <a:t>Needs: one answer sheet per team, from the resource pack.</a:t>
             </a:r>
@@ -4028,7 +4028,7 @@
                 <a:solidFill>
                   <a:srgbClr val="8B9179"/>
                 </a:solidFill>
-                <a:latin typeface="Karla"/>
+                <a:latin typeface="Calibri"/>
               </a:rPr>
               <a:t>The Pastoral Guide</a:t>
             </a:r>
@@ -4070,7 +4070,7 @@
                 <a:solidFill>
                   <a:srgbClr val="8B9179"/>
                 </a:solidFill>
-                <a:latin typeface="Karla"/>
+                <a:latin typeface="Calibri"/>
               </a:rPr>
               <a:t>1 / 27</a:t>
             </a:r>
@@ -4174,7 +4174,7 @@
                 <a:solidFill>
                   <a:srgbClr val="2B6573"/>
                 </a:solidFill>
-                <a:latin typeface="Karla"/>
+                <a:latin typeface="Calibri"/>
               </a:rPr>
               <a:t>THE FORM TIME QUIZ  ·  ROUND TWO  ·  QUESTION 7 OF 10</a:t>
             </a:r>
@@ -4350,7 +4350,7 @@
                 <a:solidFill>
                   <a:srgbClr val="FFFDF7"/>
                 </a:solidFill>
-                <a:latin typeface="Karla"/>
+                <a:latin typeface="Calibri"/>
               </a:rPr>
               <a:t>7</a:t>
             </a:r>
@@ -4388,11 +4388,11 @@
               </a:spcAft>
             </a:pPr>
             <a:r>
-              <a:rPr sz="2400" b="1" i="0">
+              <a:rPr sz="2400" b="0" i="0">
                 <a:solidFill>
                   <a:srgbClr val="2B6573"/>
                 </a:solidFill>
-                <a:latin typeface="Libre Caslon Display"/>
+                <a:latin typeface="Georgia"/>
               </a:rPr>
               <a:t>What is the smallest planet in our solar system?</a:t>
             </a:r>
@@ -4478,7 +4478,7 @@
                 <a:solidFill>
                   <a:srgbClr val="8B9179"/>
                 </a:solidFill>
-                <a:latin typeface="Karla"/>
+                <a:latin typeface="Calibri"/>
               </a:rPr>
               <a:t>Agree it as a team, then write it on the sheet.</a:t>
             </a:r>
@@ -4544,7 +4544,7 @@
                 <a:solidFill>
                   <a:srgbClr val="8B9179"/>
                 </a:solidFill>
-                <a:latin typeface="Karla"/>
+                <a:latin typeface="Calibri"/>
               </a:rPr>
               <a:t>The Pastoral Guide</a:t>
             </a:r>
@@ -4586,7 +4586,7 @@
                 <a:solidFill>
                   <a:srgbClr val="8B9179"/>
                 </a:solidFill>
-                <a:latin typeface="Karla"/>
+                <a:latin typeface="Calibri"/>
               </a:rPr>
               <a:t>10 / 27</a:t>
             </a:r>
@@ -4690,7 +4690,7 @@
                 <a:solidFill>
                   <a:srgbClr val="2B6573"/>
                 </a:solidFill>
-                <a:latin typeface="Karla"/>
+                <a:latin typeface="Calibri"/>
               </a:rPr>
               <a:t>THE FORM TIME QUIZ  ·  ROUND TWO  ·  QUESTION 8 OF 10</a:t>
             </a:r>
@@ -4866,7 +4866,7 @@
                 <a:solidFill>
                   <a:srgbClr val="FFFDF7"/>
                 </a:solidFill>
-                <a:latin typeface="Karla"/>
+                <a:latin typeface="Calibri"/>
               </a:rPr>
               <a:t>8</a:t>
             </a:r>
@@ -4904,11 +4904,11 @@
               </a:spcAft>
             </a:pPr>
             <a:r>
-              <a:rPr sz="2400" b="1" i="0">
+              <a:rPr sz="2400" b="0" i="0">
                 <a:solidFill>
                   <a:srgbClr val="2B6573"/>
                 </a:solidFill>
-                <a:latin typeface="Libre Caslon Display"/>
+                <a:latin typeface="Georgia"/>
               </a:rPr>
               <a:t>Which gas do plants take in from the air to make their food?</a:t>
             </a:r>
@@ -4994,7 +4994,7 @@
                 <a:solidFill>
                   <a:srgbClr val="8B9179"/>
                 </a:solidFill>
-                <a:latin typeface="Karla"/>
+                <a:latin typeface="Calibri"/>
               </a:rPr>
               <a:t>Agree it as a team, then write it on the sheet.</a:t>
             </a:r>
@@ -5060,7 +5060,7 @@
                 <a:solidFill>
                   <a:srgbClr val="8B9179"/>
                 </a:solidFill>
-                <a:latin typeface="Karla"/>
+                <a:latin typeface="Calibri"/>
               </a:rPr>
               <a:t>The Pastoral Guide</a:t>
             </a:r>
@@ -5102,7 +5102,7 @@
                 <a:solidFill>
                   <a:srgbClr val="8B9179"/>
                 </a:solidFill>
-                <a:latin typeface="Karla"/>
+                <a:latin typeface="Calibri"/>
               </a:rPr>
               <a:t>11 / 27</a:t>
             </a:r>
@@ -5206,7 +5206,7 @@
                 <a:solidFill>
                   <a:srgbClr val="2B6573"/>
                 </a:solidFill>
-                <a:latin typeface="Karla"/>
+                <a:latin typeface="Calibri"/>
               </a:rPr>
               <a:t>THE FORM TIME QUIZ  ·  ROUND TWO  ·  QUESTION 9 OF 10</a:t>
             </a:r>
@@ -5382,7 +5382,7 @@
                 <a:solidFill>
                   <a:srgbClr val="FFFDF7"/>
                 </a:solidFill>
-                <a:latin typeface="Karla"/>
+                <a:latin typeface="Calibri"/>
               </a:rPr>
               <a:t>9</a:t>
             </a:r>
@@ -5420,11 +5420,11 @@
               </a:spcAft>
             </a:pPr>
             <a:r>
-              <a:rPr sz="2400" b="1" i="0">
+              <a:rPr sz="2400" b="0" i="0">
                 <a:solidFill>
                   <a:srgbClr val="2B6573"/>
                 </a:solidFill>
-                <a:latin typeface="Libre Caslon Display"/>
+                <a:latin typeface="Georgia"/>
               </a:rPr>
               <a:t>What is the hardest natural material on Earth?</a:t>
             </a:r>
@@ -5466,7 +5466,7 @@
                 <a:solidFill>
                   <a:srgbClr val="8B9179"/>
                 </a:solidFill>
-                <a:latin typeface="Karla"/>
+                <a:latin typeface="Calibri"/>
               </a:rPr>
               <a:t>ONE OF THESE</a:t>
             </a:r>
@@ -5642,7 +5642,7 @@
                 <a:solidFill>
                   <a:srgbClr val="FFFDF7"/>
                 </a:solidFill>
-                <a:latin typeface="Karla"/>
+                <a:latin typeface="Calibri"/>
               </a:rPr>
               <a:t>A</a:t>
             </a:r>
@@ -5684,7 +5684,7 @@
                 <a:solidFill>
                   <a:srgbClr val="2E3436"/>
                 </a:solidFill>
-                <a:latin typeface="Karla"/>
+                <a:latin typeface="Calibri"/>
               </a:rPr>
               <a:t>Quartz</a:t>
             </a:r>
@@ -5860,7 +5860,7 @@
                 <a:solidFill>
                   <a:srgbClr val="FFFDF7"/>
                 </a:solidFill>
-                <a:latin typeface="Karla"/>
+                <a:latin typeface="Calibri"/>
               </a:rPr>
               <a:t>B</a:t>
             </a:r>
@@ -5902,7 +5902,7 @@
                 <a:solidFill>
                   <a:srgbClr val="2E3436"/>
                 </a:solidFill>
-                <a:latin typeface="Karla"/>
+                <a:latin typeface="Calibri"/>
               </a:rPr>
               <a:t>Diamond</a:t>
             </a:r>
@@ -6078,7 +6078,7 @@
                 <a:solidFill>
                   <a:srgbClr val="FFFDF7"/>
                 </a:solidFill>
-                <a:latin typeface="Karla"/>
+                <a:latin typeface="Calibri"/>
               </a:rPr>
               <a:t>C</a:t>
             </a:r>
@@ -6120,7 +6120,7 @@
                 <a:solidFill>
                   <a:srgbClr val="2E3436"/>
                 </a:solidFill>
-                <a:latin typeface="Karla"/>
+                <a:latin typeface="Calibri"/>
               </a:rPr>
               <a:t>Granite</a:t>
             </a:r>
@@ -6162,7 +6162,7 @@
                 <a:solidFill>
                   <a:srgbClr val="5C6552"/>
                 </a:solidFill>
-                <a:latin typeface="Karla"/>
+                <a:latin typeface="Calibri"/>
               </a:rPr>
               <a:t>Agree it as a team, then tick it on the sheet.</a:t>
             </a:r>
@@ -6228,7 +6228,7 @@
                 <a:solidFill>
                   <a:srgbClr val="8B9179"/>
                 </a:solidFill>
-                <a:latin typeface="Karla"/>
+                <a:latin typeface="Calibri"/>
               </a:rPr>
               <a:t>The Pastoral Guide</a:t>
             </a:r>
@@ -6270,7 +6270,7 @@
                 <a:solidFill>
                   <a:srgbClr val="8B9179"/>
                 </a:solidFill>
-                <a:latin typeface="Karla"/>
+                <a:latin typeface="Calibri"/>
               </a:rPr>
               <a:t>12 / 27</a:t>
             </a:r>
@@ -6374,7 +6374,7 @@
                 <a:solidFill>
                   <a:srgbClr val="2B6573"/>
                 </a:solidFill>
-                <a:latin typeface="Karla"/>
+                <a:latin typeface="Calibri"/>
               </a:rPr>
               <a:t>THE FORM TIME QUIZ  ·  ROUND TWO  ·  QUESTION 10 OF 10</a:t>
             </a:r>
@@ -6550,7 +6550,7 @@
                 <a:solidFill>
                   <a:srgbClr val="FFFDF7"/>
                 </a:solidFill>
-                <a:latin typeface="Karla"/>
+                <a:latin typeface="Calibri"/>
               </a:rPr>
               <a:t>10</a:t>
             </a:r>
@@ -6588,11 +6588,11 @@
               </a:spcAft>
             </a:pPr>
             <a:r>
-              <a:rPr sz="2400" b="1" i="0">
+              <a:rPr sz="2400" b="0" i="0">
                 <a:solidFill>
                   <a:srgbClr val="2B6573"/>
                 </a:solidFill>
-                <a:latin typeface="Libre Caslon Display"/>
+                <a:latin typeface="Georgia"/>
               </a:rPr>
               <a:t>What is the capital city of Canada?</a:t>
             </a:r>
@@ -6678,7 +6678,7 @@
                 <a:solidFill>
                   <a:srgbClr val="8B9179"/>
                 </a:solidFill>
-                <a:latin typeface="Karla"/>
+                <a:latin typeface="Calibri"/>
               </a:rPr>
               <a:t>Agree it as a team, then write it on the sheet.</a:t>
             </a:r>
@@ -6744,7 +6744,7 @@
                 <a:solidFill>
                   <a:srgbClr val="8B9179"/>
                 </a:solidFill>
-                <a:latin typeface="Karla"/>
+                <a:latin typeface="Calibri"/>
               </a:rPr>
               <a:t>The Pastoral Guide</a:t>
             </a:r>
@@ -6786,7 +6786,7 @@
                 <a:solidFill>
                   <a:srgbClr val="8B9179"/>
                 </a:solidFill>
-                <a:latin typeface="Karla"/>
+                <a:latin typeface="Calibri"/>
               </a:rPr>
               <a:t>13 / 27</a:t>
             </a:r>
@@ -6903,7 +6903,7 @@
                 <a:solidFill>
                   <a:srgbClr val="2B6573"/>
                 </a:solidFill>
-                <a:latin typeface="Karla"/>
+                <a:latin typeface="Calibri"/>
               </a:rPr>
               <a:t>ANSWERS</a:t>
             </a:r>
@@ -6941,11 +6941,11 @@
               </a:spcAft>
             </a:pPr>
             <a:r>
-              <a:rPr sz="4000" b="1" i="0">
+              <a:rPr sz="4000" b="0" i="0">
                 <a:solidFill>
                   <a:srgbClr val="FFFDF7"/>
                 </a:solidFill>
-                <a:latin typeface="Libre Caslon Display"/>
+                <a:latin typeface="Georgia"/>
               </a:rPr>
               <a:t>Swap sheets</a:t>
             </a:r>
@@ -7031,7 +7031,7 @@
                 <a:solidFill>
                   <a:srgbClr val="C4DCE1"/>
                 </a:solidFill>
-                <a:latin typeface="Karla"/>
+                <a:latin typeface="Calibri"/>
               </a:rPr>
               <a:t>Swap with the team next to you. Give one mark for each right answer, then add up the score out of ten.</a:t>
             </a:r>
@@ -7097,7 +7097,7 @@
                 <a:solidFill>
                   <a:srgbClr val="C4DCE1"/>
                 </a:solidFill>
-                <a:latin typeface="Karla"/>
+                <a:latin typeface="Calibri"/>
               </a:rPr>
               <a:t>The Pastoral Guide</a:t>
             </a:r>
@@ -7139,7 +7139,7 @@
                 <a:solidFill>
                   <a:srgbClr val="C4DCE1"/>
                 </a:solidFill>
-                <a:latin typeface="Karla"/>
+                <a:latin typeface="Calibri"/>
               </a:rPr>
               <a:t>14 / 27</a:t>
             </a:r>
@@ -7243,7 +7243,7 @@
                 <a:solidFill>
                   <a:srgbClr val="2B6573"/>
                 </a:solidFill>
-                <a:latin typeface="Karla"/>
+                <a:latin typeface="Calibri"/>
               </a:rPr>
               <a:t>THE FORM TIME QUIZ  ·  ANSWERS  ·  QUESTION 1</a:t>
             </a:r>
@@ -7285,7 +7285,7 @@
                 <a:solidFill>
                   <a:srgbClr val="5C6552"/>
                 </a:solidFill>
-                <a:latin typeface="Karla"/>
+                <a:latin typeface="Calibri"/>
               </a:rPr>
               <a:t>In a study of 126,000 stories on Twitter, false stories reached 1,500 people about how many times faster than true ones?</a:t>
             </a:r>
@@ -7323,11 +7323,11 @@
               </a:spcAft>
             </a:pPr>
             <a:r>
-              <a:rPr sz="3400" b="1" i="0">
+              <a:rPr sz="3400" b="0" i="0">
                 <a:solidFill>
                   <a:srgbClr val="2B6573"/>
                 </a:solidFill>
-                <a:latin typeface="Libre Caslon Display"/>
+                <a:latin typeface="Georgia"/>
               </a:rPr>
               <a:t>About six times</a:t>
             </a:r>
@@ -7459,7 +7459,7 @@
                 <a:solidFill>
                   <a:srgbClr val="2E3436"/>
                 </a:solidFill>
-                <a:latin typeface="Karla"/>
+                <a:latin typeface="Calibri"/>
               </a:rPr>
               <a:t>False stories spread faster because they are more surprising. It was people sharing them, not bots: taking the bots out made no difference.</a:t>
             </a:r>
@@ -7525,7 +7525,7 @@
                 <a:solidFill>
                   <a:srgbClr val="8B9179"/>
                 </a:solidFill>
-                <a:latin typeface="Karla"/>
+                <a:latin typeface="Calibri"/>
               </a:rPr>
               <a:t>The Pastoral Guide</a:t>
             </a:r>
@@ -7567,7 +7567,7 @@
                 <a:solidFill>
                   <a:srgbClr val="8B9179"/>
                 </a:solidFill>
-                <a:latin typeface="Karla"/>
+                <a:latin typeface="Calibri"/>
               </a:rPr>
               <a:t>15 / 27</a:t>
             </a:r>
@@ -7609,7 +7609,7 @@
                 <a:solidFill>
                   <a:srgbClr val="8B9179"/>
                 </a:solidFill>
-                <a:latin typeface="Karla"/>
+                <a:latin typeface="Calibri"/>
               </a:rPr>
               <a:t>Source: Vosoughi, Roy and Aral, Science, 2018</a:t>
             </a:r>
@@ -7713,7 +7713,7 @@
                 <a:solidFill>
                   <a:srgbClr val="2B6573"/>
                 </a:solidFill>
-                <a:latin typeface="Karla"/>
+                <a:latin typeface="Calibri"/>
               </a:rPr>
               <a:t>THE FORM TIME QUIZ  ·  ANSWERS  ·  QUESTION 2</a:t>
             </a:r>
@@ -7755,7 +7755,7 @@
                 <a:solidFill>
                   <a:srgbClr val="5C6552"/>
                 </a:solidFill>
-                <a:latin typeface="Karla"/>
+                <a:latin typeface="Calibri"/>
               </a:rPr>
               <a:t>Seeing a false claim several times can make it feel true, even when you already know the right answer.</a:t>
             </a:r>
@@ -7793,11 +7793,11 @@
               </a:spcAft>
             </a:pPr>
             <a:r>
-              <a:rPr sz="3400" b="1" i="0">
+              <a:rPr sz="3400" b="0" i="0">
                 <a:solidFill>
                   <a:srgbClr val="2B6573"/>
                 </a:solidFill>
-                <a:latin typeface="Libre Caslon Display"/>
+                <a:latin typeface="Georgia"/>
               </a:rPr>
               <a:t>Fact</a:t>
             </a:r>
@@ -7929,7 +7929,7 @@
                 <a:solidFill>
                   <a:srgbClr val="2E3436"/>
                 </a:solidFill>
-                <a:latin typeface="Karla"/>
+                <a:latin typeface="Calibri"/>
               </a:rPr>
               <a:t>In one experiment, people rated “A sari is the skirt worn by Scots” as more true after seeing it again, even though they knew it was a kilt.</a:t>
             </a:r>
@@ -7995,7 +7995,7 @@
                 <a:solidFill>
                   <a:srgbClr val="8B9179"/>
                 </a:solidFill>
-                <a:latin typeface="Karla"/>
+                <a:latin typeface="Calibri"/>
               </a:rPr>
               <a:t>The Pastoral Guide</a:t>
             </a:r>
@@ -8037,7 +8037,7 @@
                 <a:solidFill>
                   <a:srgbClr val="8B9179"/>
                 </a:solidFill>
-                <a:latin typeface="Karla"/>
+                <a:latin typeface="Calibri"/>
               </a:rPr>
               <a:t>16 / 27</a:t>
             </a:r>
@@ -8079,7 +8079,7 @@
                 <a:solidFill>
                   <a:srgbClr val="8B9179"/>
                 </a:solidFill>
-                <a:latin typeface="Karla"/>
+                <a:latin typeface="Calibri"/>
               </a:rPr>
               <a:t>Source: Fazio et al., 2015</a:t>
             </a:r>
@@ -8183,7 +8183,7 @@
                 <a:solidFill>
                   <a:srgbClr val="2B6573"/>
                 </a:solidFill>
-                <a:latin typeface="Karla"/>
+                <a:latin typeface="Calibri"/>
               </a:rPr>
               <a:t>THE FORM TIME QUIZ  ·  ANSWERS  ·  QUESTION 3</a:t>
             </a:r>
@@ -8225,7 +8225,7 @@
                 <a:solidFill>
                   <a:srgbClr val="5C6552"/>
                 </a:solidFill>
-                <a:latin typeface="Karla"/>
+                <a:latin typeface="Calibri"/>
               </a:rPr>
               <a:t>Fact-checkers leave a website and open new tabs to see what other sites say about it. What is this called?</a:t>
             </a:r>
@@ -8263,11 +8263,11 @@
               </a:spcAft>
             </a:pPr>
             <a:r>
-              <a:rPr sz="3400" b="1" i="0">
+              <a:rPr sz="3400" b="0" i="0">
                 <a:solidFill>
                   <a:srgbClr val="2B6573"/>
                 </a:solidFill>
-                <a:latin typeface="Libre Caslon Display"/>
+                <a:latin typeface="Georgia"/>
               </a:rPr>
               <a:t>Lateral reading</a:t>
             </a:r>
@@ -8399,7 +8399,7 @@
                 <a:solidFill>
                   <a:srgbClr val="2E3436"/>
                 </a:solidFill>
-                <a:latin typeface="Karla"/>
+                <a:latin typeface="Calibri"/>
               </a:rPr>
               <a:t>In a Stanford study, fact-checkers judged websites better than history professors and students, who stayed on the page and read down it.</a:t>
             </a:r>
@@ -8465,7 +8465,7 @@
                 <a:solidFill>
                   <a:srgbClr val="8B9179"/>
                 </a:solidFill>
-                <a:latin typeface="Karla"/>
+                <a:latin typeface="Calibri"/>
               </a:rPr>
               <a:t>The Pastoral Guide</a:t>
             </a:r>
@@ -8507,7 +8507,7 @@
                 <a:solidFill>
                   <a:srgbClr val="8B9179"/>
                 </a:solidFill>
-                <a:latin typeface="Karla"/>
+                <a:latin typeface="Calibri"/>
               </a:rPr>
               <a:t>17 / 27</a:t>
             </a:r>
@@ -8549,7 +8549,7 @@
                 <a:solidFill>
                   <a:srgbClr val="8B9179"/>
                 </a:solidFill>
-                <a:latin typeface="Karla"/>
+                <a:latin typeface="Calibri"/>
               </a:rPr>
               <a:t>Source: Wineburg and McGrew, Stanford</a:t>
             </a:r>
@@ -8653,7 +8653,7 @@
                 <a:solidFill>
                   <a:srgbClr val="2B6573"/>
                 </a:solidFill>
-                <a:latin typeface="Karla"/>
+                <a:latin typeface="Calibri"/>
               </a:rPr>
               <a:t>THE FORM TIME QUIZ  ·  ANSWERS  ·  QUESTION 4</a:t>
             </a:r>
@@ -8695,7 +8695,7 @@
                 <a:solidFill>
                   <a:srgbClr val="5C6552"/>
                 </a:solidFill>
-                <a:latin typeface="Karla"/>
+                <a:latin typeface="Calibri"/>
               </a:rPr>
               <a:t>In a 2022 study, people looked at photos of faces and said whether each was real or made by AI. How often were they right?</a:t>
             </a:r>
@@ -8733,11 +8733,11 @@
               </a:spcAft>
             </a:pPr>
             <a:r>
-              <a:rPr sz="3400" b="1" i="0">
+              <a:rPr sz="3400" b="0" i="0">
                 <a:solidFill>
                   <a:srgbClr val="2B6573"/>
                 </a:solidFill>
-                <a:latin typeface="Libre Caslon Display"/>
+                <a:latin typeface="Georgia"/>
               </a:rPr>
               <a:t>A.  About half the time</a:t>
             </a:r>
@@ -8869,7 +8869,7 @@
                 <a:solidFill>
                   <a:srgbClr val="2E3436"/>
                 </a:solidFill>
-                <a:latin typeface="Karla"/>
+                <a:latin typeface="Calibri"/>
               </a:rPr>
               <a:t>That is no better than guessing. People also rated the AI faces as slightly more trustworthy than the real ones.</a:t>
             </a:r>
@@ -8935,7 +8935,7 @@
                 <a:solidFill>
                   <a:srgbClr val="8B9179"/>
                 </a:solidFill>
-                <a:latin typeface="Karla"/>
+                <a:latin typeface="Calibri"/>
               </a:rPr>
               <a:t>The Pastoral Guide</a:t>
             </a:r>
@@ -8977,7 +8977,7 @@
                 <a:solidFill>
                   <a:srgbClr val="8B9179"/>
                 </a:solidFill>
-                <a:latin typeface="Karla"/>
+                <a:latin typeface="Calibri"/>
               </a:rPr>
               <a:t>18 / 27</a:t>
             </a:r>
@@ -9019,7 +9019,7 @@
                 <a:solidFill>
                   <a:srgbClr val="8B9179"/>
                 </a:solidFill>
-                <a:latin typeface="Karla"/>
+                <a:latin typeface="Calibri"/>
               </a:rPr>
               <a:t>Source: Nightingale and Farid, PNAS, 2022</a:t>
             </a:r>
@@ -9123,7 +9123,7 @@
                 <a:solidFill>
                   <a:srgbClr val="2B6573"/>
                 </a:solidFill>
-                <a:latin typeface="Karla"/>
+                <a:latin typeface="Calibri"/>
               </a:rPr>
               <a:t>THE FORM TIME QUIZ  ·  ANSWERS  ·  QUESTION 5</a:t>
             </a:r>
@@ -9165,7 +9165,7 @@
                 <a:solidFill>
                   <a:srgbClr val="5C6552"/>
                 </a:solidFill>
-                <a:latin typeface="Karla"/>
+                <a:latin typeface="Calibri"/>
               </a:rPr>
               <a:t>Asking people to check whether one headline is true can make them share more reliable news afterwards.</a:t>
             </a:r>
@@ -9203,11 +9203,11 @@
               </a:spcAft>
             </a:pPr>
             <a:r>
-              <a:rPr sz="3400" b="1" i="0">
+              <a:rPr sz="3400" b="0" i="0">
                 <a:solidFill>
                   <a:srgbClr val="2B6573"/>
                 </a:solidFill>
-                <a:latin typeface="Libre Caslon Display"/>
+                <a:latin typeface="Georgia"/>
               </a:rPr>
               <a:t>Fact</a:t>
             </a:r>
@@ -9339,7 +9339,7 @@
                 <a:solidFill>
                   <a:srgbClr val="2E3436"/>
                 </a:solidFill>
-                <a:latin typeface="Karla"/>
+                <a:latin typeface="Calibri"/>
               </a:rPr>
               <a:t>Researchers messaged over 5,000 Twitter users and asked them to rate one headline. Afterwards, those users shared news from more reliable websites.</a:t>
             </a:r>
@@ -9405,7 +9405,7 @@
                 <a:solidFill>
                   <a:srgbClr val="8B9179"/>
                 </a:solidFill>
-                <a:latin typeface="Karla"/>
+                <a:latin typeface="Calibri"/>
               </a:rPr>
               <a:t>The Pastoral Guide</a:t>
             </a:r>
@@ -9447,7 +9447,7 @@
                 <a:solidFill>
                   <a:srgbClr val="8B9179"/>
                 </a:solidFill>
-                <a:latin typeface="Karla"/>
+                <a:latin typeface="Calibri"/>
               </a:rPr>
               <a:t>19 / 27</a:t>
             </a:r>
@@ -9489,7 +9489,7 @@
                 <a:solidFill>
                   <a:srgbClr val="8B9179"/>
                 </a:solidFill>
-                <a:latin typeface="Karla"/>
+                <a:latin typeface="Calibri"/>
               </a:rPr>
               <a:t>Source: Pennycook et al., Nature, 2021</a:t>
             </a:r>
@@ -9606,7 +9606,7 @@
                 <a:solidFill>
                   <a:srgbClr val="2B6573"/>
                 </a:solidFill>
-                <a:latin typeface="Karla"/>
+                <a:latin typeface="Calibri"/>
               </a:rPr>
               <a:t>ROUND ONE</a:t>
             </a:r>
@@ -9644,11 +9644,11 @@
               </a:spcAft>
             </a:pPr>
             <a:r>
-              <a:rPr sz="4000" b="1" i="0">
+              <a:rPr sz="4000" b="0" i="0">
                 <a:solidFill>
                   <a:srgbClr val="FFFDF7"/>
                 </a:solidFill>
-                <a:latin typeface="Libre Caslon Display"/>
+                <a:latin typeface="Georgia"/>
               </a:rPr>
               <a:t>Spot the fake</a:t>
             </a:r>
@@ -9734,7 +9734,7 @@
                 <a:solidFill>
                   <a:srgbClr val="C4DCE1"/>
                 </a:solidFill>
-                <a:latin typeface="Karla"/>
+                <a:latin typeface="Calibri"/>
               </a:rPr>
               <a:t>Six questions. Some are fact or myth, some give you options, and some you write out in full.</a:t>
             </a:r>
@@ -9800,7 +9800,7 @@
                 <a:solidFill>
                   <a:srgbClr val="C4DCE1"/>
                 </a:solidFill>
-                <a:latin typeface="Karla"/>
+                <a:latin typeface="Calibri"/>
               </a:rPr>
               <a:t>The Pastoral Guide</a:t>
             </a:r>
@@ -9842,7 +9842,7 @@
                 <a:solidFill>
                   <a:srgbClr val="C4DCE1"/>
                 </a:solidFill>
-                <a:latin typeface="Karla"/>
+                <a:latin typeface="Calibri"/>
               </a:rPr>
               <a:t>2 / 27</a:t>
             </a:r>
@@ -9946,7 +9946,7 @@
                 <a:solidFill>
                   <a:srgbClr val="2B6573"/>
                 </a:solidFill>
-                <a:latin typeface="Karla"/>
+                <a:latin typeface="Calibri"/>
               </a:rPr>
               <a:t>THE FORM TIME QUIZ  ·  ANSWERS  ·  QUESTION 6</a:t>
             </a:r>
@@ -9988,7 +9988,7 @@
                 <a:solidFill>
                   <a:srgbClr val="5C6552"/>
                 </a:solidFill>
-                <a:latin typeface="Karla"/>
+                <a:latin typeface="Calibri"/>
               </a:rPr>
               <a:t>In a Stanford study, students looked at a news website. How many thought an advert marked “sponsored content” was a real news story?</a:t>
             </a:r>
@@ -10026,11 +10026,11 @@
               </a:spcAft>
             </a:pPr>
             <a:r>
-              <a:rPr sz="3400" b="1" i="0">
+              <a:rPr sz="3400" b="0" i="0">
                 <a:solidFill>
                   <a:srgbClr val="2B6573"/>
                 </a:solidFill>
-                <a:latin typeface="Libre Caslon Display"/>
+                <a:latin typeface="Georgia"/>
               </a:rPr>
               <a:t>C.  More than eight in ten</a:t>
             </a:r>
@@ -10162,7 +10162,7 @@
                 <a:solidFill>
                   <a:srgbClr val="2E3436"/>
                 </a:solidFill>
-                <a:latin typeface="Karla"/>
+                <a:latin typeface="Calibri"/>
               </a:rPr>
               <a:t>Most of them missed the “sponsored content” label, which means a company paid for the piece to look like news.</a:t>
             </a:r>
@@ -10228,7 +10228,7 @@
                 <a:solidFill>
                   <a:srgbClr val="8B9179"/>
                 </a:solidFill>
-                <a:latin typeface="Karla"/>
+                <a:latin typeface="Calibri"/>
               </a:rPr>
               <a:t>The Pastoral Guide</a:t>
             </a:r>
@@ -10270,7 +10270,7 @@
                 <a:solidFill>
                   <a:srgbClr val="8B9179"/>
                 </a:solidFill>
-                <a:latin typeface="Karla"/>
+                <a:latin typeface="Calibri"/>
               </a:rPr>
               <a:t>20 / 27</a:t>
             </a:r>
@@ -10312,7 +10312,7 @@
                 <a:solidFill>
                   <a:srgbClr val="8B9179"/>
                 </a:solidFill>
-                <a:latin typeface="Karla"/>
+                <a:latin typeface="Calibri"/>
               </a:rPr>
               <a:t>Source: Stanford History Education Group, 2016</a:t>
             </a:r>
@@ -10416,7 +10416,7 @@
                 <a:solidFill>
                   <a:srgbClr val="2B6573"/>
                 </a:solidFill>
-                <a:latin typeface="Karla"/>
+                <a:latin typeface="Calibri"/>
               </a:rPr>
               <a:t>THE FORM TIME QUIZ  ·  ANSWERS  ·  QUESTION 7</a:t>
             </a:r>
@@ -10458,7 +10458,7 @@
                 <a:solidFill>
                   <a:srgbClr val="5C6552"/>
                 </a:solidFill>
-                <a:latin typeface="Karla"/>
+                <a:latin typeface="Calibri"/>
               </a:rPr>
               <a:t>What is the smallest planet in our solar system?</a:t>
             </a:r>
@@ -10496,11 +10496,11 @@
               </a:spcAft>
             </a:pPr>
             <a:r>
-              <a:rPr sz="3400" b="1" i="0">
+              <a:rPr sz="3400" b="0" i="0">
                 <a:solidFill>
                   <a:srgbClr val="2B6573"/>
                 </a:solidFill>
-                <a:latin typeface="Libre Caslon Display"/>
+                <a:latin typeface="Georgia"/>
               </a:rPr>
               <a:t>Mercury</a:t>
             </a:r>
@@ -10632,7 +10632,7 @@
                 <a:solidFill>
                   <a:srgbClr val="2E3436"/>
                 </a:solidFill>
-                <a:latin typeface="Karla"/>
+                <a:latin typeface="Calibri"/>
               </a:rPr>
               <a:t>It is only a little bigger than our Moon.</a:t>
             </a:r>
@@ -10698,7 +10698,7 @@
                 <a:solidFill>
                   <a:srgbClr val="8B9179"/>
                 </a:solidFill>
-                <a:latin typeface="Karla"/>
+                <a:latin typeface="Calibri"/>
               </a:rPr>
               <a:t>The Pastoral Guide</a:t>
             </a:r>
@@ -10740,7 +10740,7 @@
                 <a:solidFill>
                   <a:srgbClr val="8B9179"/>
                 </a:solidFill>
-                <a:latin typeface="Karla"/>
+                <a:latin typeface="Calibri"/>
               </a:rPr>
               <a:t>21 / 27</a:t>
             </a:r>
@@ -10844,7 +10844,7 @@
                 <a:solidFill>
                   <a:srgbClr val="2B6573"/>
                 </a:solidFill>
-                <a:latin typeface="Karla"/>
+                <a:latin typeface="Calibri"/>
               </a:rPr>
               <a:t>THE FORM TIME QUIZ  ·  ANSWERS  ·  QUESTION 8</a:t>
             </a:r>
@@ -10886,7 +10886,7 @@
                 <a:solidFill>
                   <a:srgbClr val="5C6552"/>
                 </a:solidFill>
-                <a:latin typeface="Karla"/>
+                <a:latin typeface="Calibri"/>
               </a:rPr>
               <a:t>Which gas do plants take in from the air to make their food?</a:t>
             </a:r>
@@ -10924,11 +10924,11 @@
               </a:spcAft>
             </a:pPr>
             <a:r>
-              <a:rPr sz="3400" b="1" i="0">
+              <a:rPr sz="3400" b="0" i="0">
                 <a:solidFill>
                   <a:srgbClr val="2B6573"/>
                 </a:solidFill>
-                <a:latin typeface="Libre Caslon Display"/>
+                <a:latin typeface="Georgia"/>
               </a:rPr>
               <a:t>Carbon dioxide</a:t>
             </a:r>
@@ -11060,7 +11060,7 @@
                 <a:solidFill>
                   <a:srgbClr val="2E3436"/>
                 </a:solidFill>
-                <a:latin typeface="Karla"/>
+                <a:latin typeface="Calibri"/>
               </a:rPr>
               <a:t>Plants use it with water and sunlight in photosynthesis, and they give out oxygen.</a:t>
             </a:r>
@@ -11126,7 +11126,7 @@
                 <a:solidFill>
                   <a:srgbClr val="8B9179"/>
                 </a:solidFill>
-                <a:latin typeface="Karla"/>
+                <a:latin typeface="Calibri"/>
               </a:rPr>
               <a:t>The Pastoral Guide</a:t>
             </a:r>
@@ -11168,7 +11168,7 @@
                 <a:solidFill>
                   <a:srgbClr val="8B9179"/>
                 </a:solidFill>
-                <a:latin typeface="Karla"/>
+                <a:latin typeface="Calibri"/>
               </a:rPr>
               <a:t>22 / 27</a:t>
             </a:r>
@@ -11272,7 +11272,7 @@
                 <a:solidFill>
                   <a:srgbClr val="2B6573"/>
                 </a:solidFill>
-                <a:latin typeface="Karla"/>
+                <a:latin typeface="Calibri"/>
               </a:rPr>
               <a:t>THE FORM TIME QUIZ  ·  ANSWERS  ·  QUESTION 9</a:t>
             </a:r>
@@ -11314,7 +11314,7 @@
                 <a:solidFill>
                   <a:srgbClr val="5C6552"/>
                 </a:solidFill>
-                <a:latin typeface="Karla"/>
+                <a:latin typeface="Calibri"/>
               </a:rPr>
               <a:t>What is the hardest natural material on Earth?</a:t>
             </a:r>
@@ -11352,11 +11352,11 @@
               </a:spcAft>
             </a:pPr>
             <a:r>
-              <a:rPr sz="3400" b="1" i="0">
+              <a:rPr sz="3400" b="0" i="0">
                 <a:solidFill>
                   <a:srgbClr val="2B6573"/>
                 </a:solidFill>
-                <a:latin typeface="Libre Caslon Display"/>
+                <a:latin typeface="Georgia"/>
               </a:rPr>
               <a:t>B.  Diamond</a:t>
             </a:r>
@@ -11488,7 +11488,7 @@
                 <a:solidFill>
                   <a:srgbClr val="2E3436"/>
                 </a:solidFill>
-                <a:latin typeface="Karla"/>
+                <a:latin typeface="Calibri"/>
               </a:rPr>
               <a:t>A diamond is pure carbon, and it can scratch any other natural material.</a:t>
             </a:r>
@@ -11554,7 +11554,7 @@
                 <a:solidFill>
                   <a:srgbClr val="8B9179"/>
                 </a:solidFill>
-                <a:latin typeface="Karla"/>
+                <a:latin typeface="Calibri"/>
               </a:rPr>
               <a:t>The Pastoral Guide</a:t>
             </a:r>
@@ -11596,7 +11596,7 @@
                 <a:solidFill>
                   <a:srgbClr val="8B9179"/>
                 </a:solidFill>
-                <a:latin typeface="Karla"/>
+                <a:latin typeface="Calibri"/>
               </a:rPr>
               <a:t>23 / 27</a:t>
             </a:r>
@@ -11700,7 +11700,7 @@
                 <a:solidFill>
                   <a:srgbClr val="2B6573"/>
                 </a:solidFill>
-                <a:latin typeface="Karla"/>
+                <a:latin typeface="Calibri"/>
               </a:rPr>
               <a:t>THE FORM TIME QUIZ  ·  ANSWERS  ·  QUESTION 10</a:t>
             </a:r>
@@ -11742,7 +11742,7 @@
                 <a:solidFill>
                   <a:srgbClr val="5C6552"/>
                 </a:solidFill>
-                <a:latin typeface="Karla"/>
+                <a:latin typeface="Calibri"/>
               </a:rPr>
               <a:t>What is the capital city of Canada?</a:t>
             </a:r>
@@ -11780,11 +11780,11 @@
               </a:spcAft>
             </a:pPr>
             <a:r>
-              <a:rPr sz="3400" b="1" i="0">
+              <a:rPr sz="3400" b="0" i="0">
                 <a:solidFill>
                   <a:srgbClr val="2B6573"/>
                 </a:solidFill>
-                <a:latin typeface="Libre Caslon Display"/>
+                <a:latin typeface="Georgia"/>
               </a:rPr>
               <a:t>Ottawa</a:t>
             </a:r>
@@ -11916,7 +11916,7 @@
                 <a:solidFill>
                   <a:srgbClr val="2E3436"/>
                 </a:solidFill>
-                <a:latin typeface="Karla"/>
+                <a:latin typeface="Calibri"/>
               </a:rPr>
               <a:t>Not Toronto, which is bigger. Queen Victoria chose Ottawa as the capital in 1857.</a:t>
             </a:r>
@@ -11982,7 +11982,7 @@
                 <a:solidFill>
                   <a:srgbClr val="8B9179"/>
                 </a:solidFill>
-                <a:latin typeface="Karla"/>
+                <a:latin typeface="Calibri"/>
               </a:rPr>
               <a:t>The Pastoral Guide</a:t>
             </a:r>
@@ -12024,7 +12024,7 @@
                 <a:solidFill>
                   <a:srgbClr val="8B9179"/>
                 </a:solidFill>
-                <a:latin typeface="Karla"/>
+                <a:latin typeface="Calibri"/>
               </a:rPr>
               <a:t>24 / 27</a:t>
             </a:r>
@@ -12128,7 +12128,7 @@
                 <a:solidFill>
                   <a:srgbClr val="2B6573"/>
                 </a:solidFill>
-                <a:latin typeface="Karla"/>
+                <a:latin typeface="Calibri"/>
               </a:rPr>
               <a:t>THE FORM TIME QUIZ  ·  VOLUME TWO</a:t>
             </a:r>
@@ -12190,11 +12190,11 @@
               </a:spcAft>
             </a:pPr>
             <a:r>
-              <a:rPr sz="3200" b="1" i="0">
+              <a:rPr sz="3200" b="0" i="0">
                 <a:solidFill>
                   <a:srgbClr val="2B6573"/>
                 </a:solidFill>
-                <a:latin typeface="Libre Caslon Display"/>
+                <a:latin typeface="Georgia"/>
               </a:rPr>
               <a:t>Scores back to their owners</a:t>
             </a:r>
@@ -12236,7 +12236,7 @@
                 <a:solidFill>
                   <a:srgbClr val="5C6552"/>
                 </a:solidFill>
-                <a:latin typeface="Karla"/>
+                <a:latin typeface="Calibri"/>
               </a:rPr>
               <a:t>Hands up if you got ten. Then hands up if one of the answers surprised you, and tell us which.</a:t>
             </a:r>
@@ -12278,7 +12278,7 @@
                 <a:solidFill>
                   <a:srgbClr val="8B9179"/>
                 </a:solidFill>
-                <a:latin typeface="Karla"/>
+                <a:latin typeface="Calibri"/>
               </a:rPr>
               <a:t>Volume Three is coming soon to thepastoralguide.com.</a:t>
             </a:r>
@@ -12344,7 +12344,7 @@
                 <a:solidFill>
                   <a:srgbClr val="8B9179"/>
                 </a:solidFill>
-                <a:latin typeface="Karla"/>
+                <a:latin typeface="Calibri"/>
               </a:rPr>
               <a:t>The Pastoral Guide</a:t>
             </a:r>
@@ -12386,7 +12386,7 @@
                 <a:solidFill>
                   <a:srgbClr val="8B9179"/>
                 </a:solidFill>
-                <a:latin typeface="Karla"/>
+                <a:latin typeface="Calibri"/>
               </a:rPr>
               <a:t>25 / 27</a:t>
             </a:r>
@@ -12503,7 +12503,7 @@
                 <a:solidFill>
                   <a:srgbClr val="2B6573"/>
                 </a:solidFill>
-                <a:latin typeface="Karla"/>
+                <a:latin typeface="Calibri"/>
               </a:rPr>
               <a:t>FOR THE TEACHER  ·  ADD YOUR OWN</a:t>
             </a:r>
@@ -12679,7 +12679,7 @@
                 <a:solidFill>
                   <a:srgbClr val="FFFDF7"/>
                 </a:solidFill>
-                <a:latin typeface="Karla"/>
+                <a:latin typeface="Calibri"/>
               </a:rPr>
               <a:t>?</a:t>
             </a:r>
@@ -12717,11 +12717,11 @@
               </a:spcAft>
             </a:pPr>
             <a:r>
-              <a:rPr sz="2400" b="1" i="0">
+              <a:rPr sz="2400" b="0" i="0">
                 <a:solidFill>
                   <a:srgbClr val="2B6573"/>
                 </a:solidFill>
-                <a:latin typeface="Libre Caslon Display"/>
+                <a:latin typeface="Georgia"/>
               </a:rPr>
               <a:t>[ Type your own question here ]</a:t>
             </a:r>
@@ -12763,7 +12763,7 @@
                 <a:solidFill>
                   <a:srgbClr val="5C6552"/>
                 </a:solidFill>
-                <a:latin typeface="Karla"/>
+                <a:latin typeface="Calibri"/>
               </a:rPr>
               <a:t>Add your own questions here: something from assembly, a date coming up, or a question about your own school.</a:t>
             </a:r>
@@ -12785,7 +12785,7 @@
                 <a:solidFill>
                   <a:srgbClr val="5C6552"/>
                 </a:solidFill>
-                <a:latin typeface="Karla"/>
+                <a:latin typeface="Calibri"/>
               </a:rPr>
               <a:t>Duplicate this slide for each one and drag it in after question 10. There are two spare rows on the answer sheet for them.</a:t>
             </a:r>
@@ -12851,7 +12851,7 @@
                 <a:solidFill>
                   <a:srgbClr val="8B9179"/>
                 </a:solidFill>
-                <a:latin typeface="Karla"/>
+                <a:latin typeface="Calibri"/>
               </a:rPr>
               <a:t>The Pastoral Guide</a:t>
             </a:r>
@@ -12893,7 +12893,7 @@
                 <a:solidFill>
                   <a:srgbClr val="8B9179"/>
                 </a:solidFill>
-                <a:latin typeface="Karla"/>
+                <a:latin typeface="Calibri"/>
               </a:rPr>
               <a:t>26 / 27</a:t>
             </a:r>
@@ -13010,7 +13010,7 @@
                 <a:solidFill>
                   <a:srgbClr val="2B6573"/>
                 </a:solidFill>
-                <a:latin typeface="Karla"/>
+                <a:latin typeface="Calibri"/>
               </a:rPr>
               <a:t>FOR THE TEACHER  ·  ADD YOUR OWN</a:t>
             </a:r>
@@ -13052,7 +13052,7 @@
                 <a:solidFill>
                   <a:srgbClr val="5C6552"/>
                 </a:solidFill>
-                <a:latin typeface="Karla"/>
+                <a:latin typeface="Calibri"/>
               </a:rPr>
               <a:t>[ Your question again, so the room remembers it ]</a:t>
             </a:r>
@@ -13090,11 +13090,11 @@
               </a:spcAft>
             </a:pPr>
             <a:r>
-              <a:rPr sz="3400" b="1" i="0">
+              <a:rPr sz="3400" b="0" i="0">
                 <a:solidFill>
                   <a:srgbClr val="2B6573"/>
                 </a:solidFill>
-                <a:latin typeface="Libre Caslon Display"/>
+                <a:latin typeface="Georgia"/>
               </a:rPr>
               <a:t>[ The answer ]</a:t>
             </a:r>
@@ -13226,7 +13226,7 @@
                 <a:solidFill>
                   <a:srgbClr val="2E3436"/>
                 </a:solidFill>
-                <a:latin typeface="Karla"/>
+                <a:latin typeface="Calibri"/>
               </a:rPr>
               <a:t>[ One line on why, if there is something worth knowing ]</a:t>
             </a:r>
@@ -13268,7 +13268,7 @@
                 <a:solidFill>
                   <a:srgbClr val="5C6552"/>
                 </a:solidFill>
-                <a:latin typeface="Karla"/>
+                <a:latin typeface="Calibri"/>
               </a:rPr>
               <a:t>Duplicate this slide for each of your own questions and drag it in after the answer to question 10.</a:t>
             </a:r>
@@ -13334,7 +13334,7 @@
                 <a:solidFill>
                   <a:srgbClr val="8B9179"/>
                 </a:solidFill>
-                <a:latin typeface="Karla"/>
+                <a:latin typeface="Calibri"/>
               </a:rPr>
               <a:t>The Pastoral Guide</a:t>
             </a:r>
@@ -13376,7 +13376,7 @@
                 <a:solidFill>
                   <a:srgbClr val="8B9179"/>
                 </a:solidFill>
-                <a:latin typeface="Karla"/>
+                <a:latin typeface="Calibri"/>
               </a:rPr>
               <a:t>27 / 27</a:t>
             </a:r>
@@ -13480,7 +13480,7 @@
                 <a:solidFill>
                   <a:srgbClr val="2B6573"/>
                 </a:solidFill>
-                <a:latin typeface="Karla"/>
+                <a:latin typeface="Calibri"/>
               </a:rPr>
               <a:t>THE FORM TIME QUIZ  ·  ROUND ONE  ·  QUESTION 1 OF 10</a:t>
             </a:r>
@@ -13656,7 +13656,7 @@
                 <a:solidFill>
                   <a:srgbClr val="FFFDF7"/>
                 </a:solidFill>
-                <a:latin typeface="Karla"/>
+                <a:latin typeface="Calibri"/>
               </a:rPr>
               <a:t>1</a:t>
             </a:r>
@@ -13694,11 +13694,11 @@
               </a:spcAft>
             </a:pPr>
             <a:r>
-              <a:rPr sz="2100" b="1" i="0">
+              <a:rPr sz="2100" b="0" i="0">
                 <a:solidFill>
                   <a:srgbClr val="2B6573"/>
                 </a:solidFill>
-                <a:latin typeface="Libre Caslon Display"/>
+                <a:latin typeface="Georgia"/>
               </a:rPr>
               <a:t>In a study of 126,000 stories on Twitter, false stories reached 1,500 people about how many times faster than true ones?</a:t>
             </a:r>
@@ -13784,7 +13784,7 @@
                 <a:solidFill>
                   <a:srgbClr val="8B9179"/>
                 </a:solidFill>
-                <a:latin typeface="Karla"/>
+                <a:latin typeface="Calibri"/>
               </a:rPr>
               <a:t>Agree it as a team, then write it on the sheet.</a:t>
             </a:r>
@@ -13850,7 +13850,7 @@
                 <a:solidFill>
                   <a:srgbClr val="8B9179"/>
                 </a:solidFill>
-                <a:latin typeface="Karla"/>
+                <a:latin typeface="Calibri"/>
               </a:rPr>
               <a:t>The Pastoral Guide</a:t>
             </a:r>
@@ -13892,7 +13892,7 @@
                 <a:solidFill>
                   <a:srgbClr val="8B9179"/>
                 </a:solidFill>
-                <a:latin typeface="Karla"/>
+                <a:latin typeface="Calibri"/>
               </a:rPr>
               <a:t>3 / 27</a:t>
             </a:r>
@@ -13996,7 +13996,7 @@
                 <a:solidFill>
                   <a:srgbClr val="2B6573"/>
                 </a:solidFill>
-                <a:latin typeface="Karla"/>
+                <a:latin typeface="Calibri"/>
               </a:rPr>
               <a:t>THE FORM TIME QUIZ  ·  ROUND ONE  ·  QUESTION 2 OF 10</a:t>
             </a:r>
@@ -14172,7 +14172,7 @@
                 <a:solidFill>
                   <a:srgbClr val="FFFDF7"/>
                 </a:solidFill>
-                <a:latin typeface="Karla"/>
+                <a:latin typeface="Calibri"/>
               </a:rPr>
               <a:t>2</a:t>
             </a:r>
@@ -14210,11 +14210,11 @@
               </a:spcAft>
             </a:pPr>
             <a:r>
-              <a:rPr sz="2400" b="1" i="0">
+              <a:rPr sz="2400" b="0" i="0">
                 <a:solidFill>
                   <a:srgbClr val="2B6573"/>
                 </a:solidFill>
-                <a:latin typeface="Libre Caslon Display"/>
+                <a:latin typeface="Georgia"/>
               </a:rPr>
               <a:t>Seeing a false claim several times can make it feel true, even when you already know the right answer.</a:t>
             </a:r>
@@ -14256,7 +14256,7 @@
                 <a:solidFill>
                   <a:srgbClr val="8B9179"/>
                 </a:solidFill>
-                <a:latin typeface="Karla"/>
+                <a:latin typeface="Calibri"/>
               </a:rPr>
               <a:t>FACT OR MYTH?</a:t>
             </a:r>
@@ -14384,11 +14384,11 @@
               </a:spcAft>
             </a:pPr>
             <a:r>
-              <a:rPr sz="2000" b="1" i="0">
+              <a:rPr sz="2000" b="0" i="0">
                 <a:solidFill>
                   <a:srgbClr val="2B6573"/>
                 </a:solidFill>
-                <a:latin typeface="Libre Caslon Display"/>
+                <a:latin typeface="Georgia"/>
               </a:rPr>
               <a:t>Fact</a:t>
             </a:r>
@@ -14516,11 +14516,11 @@
               </a:spcAft>
             </a:pPr>
             <a:r>
-              <a:rPr sz="2000" b="1" i="0">
+              <a:rPr sz="2000" b="0" i="0">
                 <a:solidFill>
                   <a:srgbClr val="2B6573"/>
                 </a:solidFill>
-                <a:latin typeface="Libre Caslon Display"/>
+                <a:latin typeface="Georgia"/>
               </a:rPr>
               <a:t>Myth</a:t>
             </a:r>
@@ -14562,7 +14562,7 @@
                 <a:solidFill>
                   <a:srgbClr val="5C6552"/>
                 </a:solidFill>
-                <a:latin typeface="Karla"/>
+                <a:latin typeface="Calibri"/>
               </a:rPr>
               <a:t>Agree it as a team, then tick it on the sheet.</a:t>
             </a:r>
@@ -14628,7 +14628,7 @@
                 <a:solidFill>
                   <a:srgbClr val="8B9179"/>
                 </a:solidFill>
-                <a:latin typeface="Karla"/>
+                <a:latin typeface="Calibri"/>
               </a:rPr>
               <a:t>The Pastoral Guide</a:t>
             </a:r>
@@ -14670,7 +14670,7 @@
                 <a:solidFill>
                   <a:srgbClr val="8B9179"/>
                 </a:solidFill>
-                <a:latin typeface="Karla"/>
+                <a:latin typeface="Calibri"/>
               </a:rPr>
               <a:t>4 / 27</a:t>
             </a:r>
@@ -14774,7 +14774,7 @@
                 <a:solidFill>
                   <a:srgbClr val="2B6573"/>
                 </a:solidFill>
-                <a:latin typeface="Karla"/>
+                <a:latin typeface="Calibri"/>
               </a:rPr>
               <a:t>THE FORM TIME QUIZ  ·  ROUND ONE  ·  QUESTION 3 OF 10</a:t>
             </a:r>
@@ -14950,7 +14950,7 @@
                 <a:solidFill>
                   <a:srgbClr val="FFFDF7"/>
                 </a:solidFill>
-                <a:latin typeface="Karla"/>
+                <a:latin typeface="Calibri"/>
               </a:rPr>
               <a:t>3</a:t>
             </a:r>
@@ -14988,11 +14988,11 @@
               </a:spcAft>
             </a:pPr>
             <a:r>
-              <a:rPr sz="2100" b="1" i="0">
+              <a:rPr sz="2100" b="0" i="0">
                 <a:solidFill>
                   <a:srgbClr val="2B6573"/>
                 </a:solidFill>
-                <a:latin typeface="Libre Caslon Display"/>
+                <a:latin typeface="Georgia"/>
               </a:rPr>
               <a:t>Fact-checkers leave a website and open new tabs to see what other sites say about it. What is this called?</a:t>
             </a:r>
@@ -15078,7 +15078,7 @@
                 <a:solidFill>
                   <a:srgbClr val="8B9179"/>
                 </a:solidFill>
-                <a:latin typeface="Karla"/>
+                <a:latin typeface="Calibri"/>
               </a:rPr>
               <a:t>Agree it as a team, then write it on the sheet.</a:t>
             </a:r>
@@ -15144,7 +15144,7 @@
                 <a:solidFill>
                   <a:srgbClr val="8B9179"/>
                 </a:solidFill>
-                <a:latin typeface="Karla"/>
+                <a:latin typeface="Calibri"/>
               </a:rPr>
               <a:t>The Pastoral Guide</a:t>
             </a:r>
@@ -15186,7 +15186,7 @@
                 <a:solidFill>
                   <a:srgbClr val="8B9179"/>
                 </a:solidFill>
-                <a:latin typeface="Karla"/>
+                <a:latin typeface="Calibri"/>
               </a:rPr>
               <a:t>5 / 27</a:t>
             </a:r>
@@ -15290,7 +15290,7 @@
                 <a:solidFill>
                   <a:srgbClr val="2B6573"/>
                 </a:solidFill>
-                <a:latin typeface="Karla"/>
+                <a:latin typeface="Calibri"/>
               </a:rPr>
               <a:t>THE FORM TIME QUIZ  ·  ROUND ONE  ·  QUESTION 4 OF 10</a:t>
             </a:r>
@@ -15466,7 +15466,7 @@
                 <a:solidFill>
                   <a:srgbClr val="FFFDF7"/>
                 </a:solidFill>
-                <a:latin typeface="Karla"/>
+                <a:latin typeface="Calibri"/>
               </a:rPr>
               <a:t>4</a:t>
             </a:r>
@@ -15504,11 +15504,11 @@
               </a:spcAft>
             </a:pPr>
             <a:r>
-              <a:rPr sz="2100" b="1" i="0">
+              <a:rPr sz="2100" b="0" i="0">
                 <a:solidFill>
                   <a:srgbClr val="2B6573"/>
                 </a:solidFill>
-                <a:latin typeface="Libre Caslon Display"/>
+                <a:latin typeface="Georgia"/>
               </a:rPr>
               <a:t>In a 2022 study, people looked at photos of faces and said whether each was real or made by AI. How often were they right?</a:t>
             </a:r>
@@ -15550,7 +15550,7 @@
                 <a:solidFill>
                   <a:srgbClr val="8B9179"/>
                 </a:solidFill>
-                <a:latin typeface="Karla"/>
+                <a:latin typeface="Calibri"/>
               </a:rPr>
               <a:t>ONE OF THESE</a:t>
             </a:r>
@@ -15726,7 +15726,7 @@
                 <a:solidFill>
                   <a:srgbClr val="FFFDF7"/>
                 </a:solidFill>
-                <a:latin typeface="Karla"/>
+                <a:latin typeface="Calibri"/>
               </a:rPr>
               <a:t>A</a:t>
             </a:r>
@@ -15768,7 +15768,7 @@
                 <a:solidFill>
                   <a:srgbClr val="2E3436"/>
                 </a:solidFill>
-                <a:latin typeface="Karla"/>
+                <a:latin typeface="Calibri"/>
               </a:rPr>
               <a:t>About half the time</a:t>
             </a:r>
@@ -15944,7 +15944,7 @@
                 <a:solidFill>
                   <a:srgbClr val="FFFDF7"/>
                 </a:solidFill>
-                <a:latin typeface="Karla"/>
+                <a:latin typeface="Calibri"/>
               </a:rPr>
               <a:t>B</a:t>
             </a:r>
@@ -15986,7 +15986,7 @@
                 <a:solidFill>
                   <a:srgbClr val="2E3436"/>
                 </a:solidFill>
-                <a:latin typeface="Karla"/>
+                <a:latin typeface="Calibri"/>
               </a:rPr>
               <a:t>Three times in four</a:t>
             </a:r>
@@ -16162,7 +16162,7 @@
                 <a:solidFill>
                   <a:srgbClr val="FFFDF7"/>
                 </a:solidFill>
-                <a:latin typeface="Karla"/>
+                <a:latin typeface="Calibri"/>
               </a:rPr>
               <a:t>C</a:t>
             </a:r>
@@ -16204,7 +16204,7 @@
                 <a:solidFill>
                   <a:srgbClr val="2E3436"/>
                 </a:solidFill>
-                <a:latin typeface="Karla"/>
+                <a:latin typeface="Calibri"/>
               </a:rPr>
               <a:t>Almost every time</a:t>
             </a:r>
@@ -16246,7 +16246,7 @@
                 <a:solidFill>
                   <a:srgbClr val="5C6552"/>
                 </a:solidFill>
-                <a:latin typeface="Karla"/>
+                <a:latin typeface="Calibri"/>
               </a:rPr>
               <a:t>Agree it as a team, then tick it on the sheet.</a:t>
             </a:r>
@@ -16312,7 +16312,7 @@
                 <a:solidFill>
                   <a:srgbClr val="8B9179"/>
                 </a:solidFill>
-                <a:latin typeface="Karla"/>
+                <a:latin typeface="Calibri"/>
               </a:rPr>
               <a:t>The Pastoral Guide</a:t>
             </a:r>
@@ -16354,7 +16354,7 @@
                 <a:solidFill>
                   <a:srgbClr val="8B9179"/>
                 </a:solidFill>
-                <a:latin typeface="Karla"/>
+                <a:latin typeface="Calibri"/>
               </a:rPr>
               <a:t>6 / 27</a:t>
             </a:r>
@@ -16458,7 +16458,7 @@
                 <a:solidFill>
                   <a:srgbClr val="2B6573"/>
                 </a:solidFill>
-                <a:latin typeface="Karla"/>
+                <a:latin typeface="Calibri"/>
               </a:rPr>
               <a:t>THE FORM TIME QUIZ  ·  ROUND ONE  ·  QUESTION 5 OF 10</a:t>
             </a:r>
@@ -16634,7 +16634,7 @@
                 <a:solidFill>
                   <a:srgbClr val="FFFDF7"/>
                 </a:solidFill>
-                <a:latin typeface="Karla"/>
+                <a:latin typeface="Calibri"/>
               </a:rPr>
               <a:t>5</a:t>
             </a:r>
@@ -16672,11 +16672,11 @@
               </a:spcAft>
             </a:pPr>
             <a:r>
-              <a:rPr sz="2100" b="1" i="0">
+              <a:rPr sz="2100" b="0" i="0">
                 <a:solidFill>
                   <a:srgbClr val="2B6573"/>
                 </a:solidFill>
-                <a:latin typeface="Libre Caslon Display"/>
+                <a:latin typeface="Georgia"/>
               </a:rPr>
               <a:t>Asking people to check whether one headline is true can make them share more reliable news afterwards.</a:t>
             </a:r>
@@ -16718,7 +16718,7 @@
                 <a:solidFill>
                   <a:srgbClr val="8B9179"/>
                 </a:solidFill>
-                <a:latin typeface="Karla"/>
+                <a:latin typeface="Calibri"/>
               </a:rPr>
               <a:t>FACT OR MYTH?</a:t>
             </a:r>
@@ -16846,11 +16846,11 @@
               </a:spcAft>
             </a:pPr>
             <a:r>
-              <a:rPr sz="2000" b="1" i="0">
+              <a:rPr sz="2000" b="0" i="0">
                 <a:solidFill>
                   <a:srgbClr val="2B6573"/>
                 </a:solidFill>
-                <a:latin typeface="Libre Caslon Display"/>
+                <a:latin typeface="Georgia"/>
               </a:rPr>
               <a:t>Fact</a:t>
             </a:r>
@@ -16978,11 +16978,11 @@
               </a:spcAft>
             </a:pPr>
             <a:r>
-              <a:rPr sz="2000" b="1" i="0">
+              <a:rPr sz="2000" b="0" i="0">
                 <a:solidFill>
                   <a:srgbClr val="2B6573"/>
                 </a:solidFill>
-                <a:latin typeface="Libre Caslon Display"/>
+                <a:latin typeface="Georgia"/>
               </a:rPr>
               <a:t>Myth</a:t>
             </a:r>
@@ -17024,7 +17024,7 @@
                 <a:solidFill>
                   <a:srgbClr val="5C6552"/>
                 </a:solidFill>
-                <a:latin typeface="Karla"/>
+                <a:latin typeface="Calibri"/>
               </a:rPr>
               <a:t>Agree it as a team, then tick it on the sheet.</a:t>
             </a:r>
@@ -17090,7 +17090,7 @@
                 <a:solidFill>
                   <a:srgbClr val="8B9179"/>
                 </a:solidFill>
-                <a:latin typeface="Karla"/>
+                <a:latin typeface="Calibri"/>
               </a:rPr>
               <a:t>The Pastoral Guide</a:t>
             </a:r>
@@ -17132,7 +17132,7 @@
                 <a:solidFill>
                   <a:srgbClr val="8B9179"/>
                 </a:solidFill>
-                <a:latin typeface="Karla"/>
+                <a:latin typeface="Calibri"/>
               </a:rPr>
               <a:t>7 / 27</a:t>
             </a:r>
@@ -17236,7 +17236,7 @@
                 <a:solidFill>
                   <a:srgbClr val="2B6573"/>
                 </a:solidFill>
-                <a:latin typeface="Karla"/>
+                <a:latin typeface="Calibri"/>
               </a:rPr>
               <a:t>THE FORM TIME QUIZ  ·  ROUND ONE  ·  QUESTION 6 OF 10</a:t>
             </a:r>
@@ -17412,7 +17412,7 @@
                 <a:solidFill>
                   <a:srgbClr val="FFFDF7"/>
                 </a:solidFill>
-                <a:latin typeface="Karla"/>
+                <a:latin typeface="Calibri"/>
               </a:rPr>
               <a:t>6</a:t>
             </a:r>
@@ -17450,11 +17450,11 @@
               </a:spcAft>
             </a:pPr>
             <a:r>
-              <a:rPr sz="2100" b="1" i="0">
+              <a:rPr sz="2100" b="0" i="0">
                 <a:solidFill>
                   <a:srgbClr val="2B6573"/>
                 </a:solidFill>
-                <a:latin typeface="Libre Caslon Display"/>
+                <a:latin typeface="Georgia"/>
               </a:rPr>
               <a:t>In a Stanford study, students looked at a news website. How many thought an advert marked “sponsored content” was a real news story?</a:t>
             </a:r>
@@ -17496,7 +17496,7 @@
                 <a:solidFill>
                   <a:srgbClr val="8B9179"/>
                 </a:solidFill>
-                <a:latin typeface="Karla"/>
+                <a:latin typeface="Calibri"/>
               </a:rPr>
               <a:t>ONE OF THESE</a:t>
             </a:r>
@@ -17672,7 +17672,7 @@
                 <a:solidFill>
                   <a:srgbClr val="FFFDF7"/>
                 </a:solidFill>
-                <a:latin typeface="Karla"/>
+                <a:latin typeface="Calibri"/>
               </a:rPr>
               <a:t>A</a:t>
             </a:r>
@@ -17714,7 +17714,7 @@
                 <a:solidFill>
                   <a:srgbClr val="2E3436"/>
                 </a:solidFill>
-                <a:latin typeface="Karla"/>
+                <a:latin typeface="Calibri"/>
               </a:rPr>
               <a:t>About one in five</a:t>
             </a:r>
@@ -17890,7 +17890,7 @@
                 <a:solidFill>
                   <a:srgbClr val="FFFDF7"/>
                 </a:solidFill>
-                <a:latin typeface="Karla"/>
+                <a:latin typeface="Calibri"/>
               </a:rPr>
               <a:t>B</a:t>
             </a:r>
@@ -17932,7 +17932,7 @@
                 <a:solidFill>
                   <a:srgbClr val="2E3436"/>
                 </a:solidFill>
-                <a:latin typeface="Karla"/>
+                <a:latin typeface="Calibri"/>
               </a:rPr>
               <a:t>About half</a:t>
             </a:r>
@@ -18108,7 +18108,7 @@
                 <a:solidFill>
                   <a:srgbClr val="FFFDF7"/>
                 </a:solidFill>
-                <a:latin typeface="Karla"/>
+                <a:latin typeface="Calibri"/>
               </a:rPr>
               <a:t>C</a:t>
             </a:r>
@@ -18150,7 +18150,7 @@
                 <a:solidFill>
                   <a:srgbClr val="2E3436"/>
                 </a:solidFill>
-                <a:latin typeface="Karla"/>
+                <a:latin typeface="Calibri"/>
               </a:rPr>
               <a:t>More than eight in ten</a:t>
             </a:r>
@@ -18192,7 +18192,7 @@
                 <a:solidFill>
                   <a:srgbClr val="5C6552"/>
                 </a:solidFill>
-                <a:latin typeface="Karla"/>
+                <a:latin typeface="Calibri"/>
               </a:rPr>
               <a:t>Agree it as a team, then tick it on the sheet.</a:t>
             </a:r>
@@ -18258,7 +18258,7 @@
                 <a:solidFill>
                   <a:srgbClr val="8B9179"/>
                 </a:solidFill>
-                <a:latin typeface="Karla"/>
+                <a:latin typeface="Calibri"/>
               </a:rPr>
               <a:t>The Pastoral Guide</a:t>
             </a:r>
@@ -18300,7 +18300,7 @@
                 <a:solidFill>
                   <a:srgbClr val="8B9179"/>
                 </a:solidFill>
-                <a:latin typeface="Karla"/>
+                <a:latin typeface="Calibri"/>
               </a:rPr>
               <a:t>8 / 27</a:t>
             </a:r>
@@ -18417,7 +18417,7 @@
                 <a:solidFill>
                   <a:srgbClr val="2B6573"/>
                 </a:solidFill>
-                <a:latin typeface="Karla"/>
+                <a:latin typeface="Calibri"/>
               </a:rPr>
               <a:t>ROUND TWO</a:t>
             </a:r>
@@ -18455,11 +18455,11 @@
               </a:spcAft>
             </a:pPr>
             <a:r>
-              <a:rPr sz="4000" b="1" i="0">
+              <a:rPr sz="4000" b="0" i="0">
                 <a:solidFill>
                   <a:srgbClr val="FFFDF7"/>
                 </a:solidFill>
-                <a:latin typeface="Libre Caslon Display"/>
+                <a:latin typeface="Georgia"/>
               </a:rPr>
               <a:t>General knowledge</a:t>
             </a:r>
@@ -18545,7 +18545,7 @@
                 <a:solidFill>
                   <a:srgbClr val="C4DCE1"/>
                 </a:solidFill>
-                <a:latin typeface="Karla"/>
+                <a:latin typeface="Calibri"/>
               </a:rPr>
               <a:t>Four questions to finish. Some have options, and some you write out in full.</a:t>
             </a:r>
@@ -18611,7 +18611,7 @@
                 <a:solidFill>
                   <a:srgbClr val="C4DCE1"/>
                 </a:solidFill>
-                <a:latin typeface="Karla"/>
+                <a:latin typeface="Calibri"/>
               </a:rPr>
               <a:t>The Pastoral Guide</a:t>
             </a:r>
@@ -18653,7 +18653,7 @@
                 <a:solidFill>
                   <a:srgbClr val="C4DCE1"/>
                 </a:solidFill>
-                <a:latin typeface="Karla"/>
+                <a:latin typeface="Calibri"/>
               </a:rPr>
               <a:t>9 / 27</a:t>
             </a:r>
